--- a/slides/Chapter 02 - The Texas Constitution (Lecture Deck).pptx
+++ b/slides/Chapter 02 - The Texas Constitution (Lecture Deck).pptx
@@ -11800,7 +11800,7 @@
         </p:nvSpPr>
         <p:spPr>
           <a:xfrm>
-            <a:off x="594360" y="2551176"/>
+            <a:off x="594360" y="2459736"/>
             <a:ext cx="2377440" cy="292608"/>
           </a:xfrm>
           <a:prstGeom prst="rect">
@@ -11839,7 +11839,7 @@
         </p:nvSpPr>
         <p:spPr>
           <a:xfrm>
-            <a:off x="3063240" y="2532888"/>
+            <a:off x="3063240" y="2441448"/>
             <a:ext cx="4480560" cy="685800"/>
           </a:xfrm>
           <a:prstGeom prst="rect">
@@ -11881,7 +11881,7 @@
         </p:nvSpPr>
         <p:spPr>
           <a:xfrm>
-            <a:off x="594360" y="3300984"/>
+            <a:off x="594360" y="3118104"/>
             <a:ext cx="2377440" cy="292608"/>
           </a:xfrm>
           <a:prstGeom prst="rect">
@@ -11920,7 +11920,7 @@
         </p:nvSpPr>
         <p:spPr>
           <a:xfrm>
-            <a:off x="3063240" y="3282696"/>
+            <a:off x="3063240" y="3099816"/>
             <a:ext cx="4480560" cy="685800"/>
           </a:xfrm>
           <a:prstGeom prst="rect">
@@ -11962,7 +11962,7 @@
         </p:nvSpPr>
         <p:spPr>
           <a:xfrm>
-            <a:off x="594360" y="4050792"/>
+            <a:off x="594360" y="3776472"/>
             <a:ext cx="2377440" cy="292608"/>
           </a:xfrm>
           <a:prstGeom prst="rect">
@@ -12001,7 +12001,7 @@
         </p:nvSpPr>
         <p:spPr>
           <a:xfrm>
-            <a:off x="3063240" y="4032504"/>
+            <a:off x="3063240" y="3758184"/>
             <a:ext cx="4480560" cy="685800"/>
           </a:xfrm>
           <a:prstGeom prst="rect">
@@ -12043,7 +12043,7 @@
         </p:nvSpPr>
         <p:spPr>
           <a:xfrm>
-            <a:off x="594360" y="4800600"/>
+            <a:off x="594360" y="4434840"/>
             <a:ext cx="2377440" cy="292608"/>
           </a:xfrm>
           <a:prstGeom prst="rect">
@@ -12082,7 +12082,7 @@
         </p:nvSpPr>
         <p:spPr>
           <a:xfrm>
-            <a:off x="3063240" y="4782312"/>
+            <a:off x="3063240" y="4416552"/>
             <a:ext cx="4480560" cy="685800"/>
           </a:xfrm>
           <a:prstGeom prst="rect">
@@ -12124,7 +12124,7 @@
         </p:nvSpPr>
         <p:spPr>
           <a:xfrm>
-            <a:off x="594360" y="4709160"/>
+            <a:off x="594360" y="5212080"/>
             <a:ext cx="11002975" cy="1143000"/>
           </a:xfrm>
           <a:prstGeom prst="roundRect">
@@ -12151,7 +12151,7 @@
         </p:nvSpPr>
         <p:spPr>
           <a:xfrm>
-            <a:off x="868680" y="4873752"/>
+            <a:off x="868680" y="5376672"/>
             <a:ext cx="10454335" cy="329184"/>
           </a:xfrm>
           <a:prstGeom prst="rect">
@@ -12190,7 +12190,7 @@
         </p:nvSpPr>
         <p:spPr>
           <a:xfrm>
-            <a:off x="868680" y="5239512"/>
+            <a:off x="868680" y="5742432"/>
             <a:ext cx="10454335" cy="429768"/>
           </a:xfrm>
           <a:prstGeom prst="rect">

--- a/slides/Chapter 02 - The Texas Constitution (Lecture Deck).pptx
+++ b/slides/Chapter 02 - The Texas Constitution (Lecture Deck).pptx
@@ -3925,7 +3925,7 @@
         <p:spPr>
           <a:xfrm>
             <a:off x="868680" y="5998464"/>
-            <a:ext cx="10454335" cy="182880"/>
+            <a:ext cx="10454335" cy="201168"/>
           </a:xfrm>
           <a:prstGeom prst="rect">
             <a:avLst/>

--- a/slides/Chapter 02 - The Texas Constitution (Lecture Deck).pptx
+++ b/slides/Chapter 02 - The Texas Constitution (Lecture Deck).pptx
@@ -522,9 +522,9 @@
 50 minute version.
 OPENING (2 min). Ask: "How long is the U.S. Constitution?" Most students guess
 too high. It runs roughly 7,500 words including amendments. Then ask about the
-Texas Constitution. It runs past 86,000 words with over 500 amendments. Let the
-gap sit, then ask why a state document would need eleven times the text of the
-one that governs the whole country.
+Texas Constitution. It runs past 90,000 words with nearly 550 amendments. Let
+the gap sit, then ask why a state document would need twelve times the text of
+the one that governs the whole country.
 That question is the chapter. The answer is that the U.S. Constitution grants
 powers broadly and trusts interpretation, while the Texas Constitution restricts
 in detail and trusts almost no one.</a:t>
@@ -621,10 +621,11 @@
 WHY SO MANY AMENDMENTS: this is the payoff of the previous slide. Because the
 document restricts rather than grants, routine adjustments need constitutional
 change. Other states pass a statute; Texas holds an election.
-MAKE IT CONCRETE AND CURRENT. In 2025 Texans voted on amendments including
-raising the homestead exemption to $140,000, dedicating up to $1 billion a year
-to water infrastructure, and banning several new taxes. Those are policy
-decisions made by constitutional amendment.
+MAKE IT CONCRETE AND CURRENT. On November 4, 2025, Texans approved all 17
+proposed amendments, including raising the school homestead exemption to
+$140,000, dedicating up to $1 billion a year to the Texas Water Fund through
+2047, and banning capital-gains, securities-transaction, and inheritance taxes.
+Those are policy decisions made by constitutional amendment.
 CIVIC POINT WORTH MAKING: amendment elections are usually held in odd-numbered
 November years with very low turnout. A small, motivated electorate is rewriting
 the state's founding document. Connect to Chapter 8.</a:t>
@@ -1481,7 +1482,9 @@
           <a:p>
             <a:r>
               <a:rPr lang="en-US" dirty="0"/>
-              <a:t>TIMING: 6 minutes. Do not narrate all eight. Pick three and move.
+              <a:t>TIMING: 6 minutes. Do not narrate all eight. Pick three and move. Eight
+documents, seven Texas constitutions: the 1824 charter was Mexico's national
+constitution.
 THE THREE THAT MATTER:
   1836, because an independent nation had to invent a government from scratch.
   1869, because it centralized power and produced Davis.
@@ -1786,8 +1789,9 @@
 was resented" miss that the resentment attached to real expansions of democracy
 as well as to centralized power. Both are true and both belong in the account.
 The centralization is the mechanical point that matters for the next slide. Four
-year term, appointment power, control of registration, and a state police force
-are the specific powers the 1876 framers stripped out.</a:t>
+year term, appointment power, and control of registration are the specific
+powers the 1876 framers stripped out; the Legislature had already repealed the
+state police in 1873.</a:t>
             </a:r>
             <a:endParaRPr lang="en-US" dirty="0"/>
           </a:p>
@@ -1975,13 +1979,14 @@
               <a:t>TIMING: 8 minutes. The most important slide in the chapter.
 THE ARGUMENT: every item on this list is a specific answer to a specific Davis
 power. He had a long term, so they shortened it. He appointed local officials, so
-they made them elected. He had a state police force, so they abolished it. He
+they made them elected. He had a state police force, so the Legislature repealed
+it in 1873 and the framers made sure nothing like it could be revived. He
 controlled registration, so they stripped that out.
 THE DEEPEST STRUCTURAL POINT, and the one students find hardest: the U.S.
 Constitution GRANTS powers and leaves the details to interpretation. The Texas
 Constitution RESTRICTS in detail. That is why Texas needs an amendment for things
-other states handle by statute, and why the document has grown past 86,000 words
-with more than 500 amendments.
+other states handle by statute, and why the document has grown past 90,000 words
+with nearly 550 amendments.
 ASK: "What is the cost of a government designed to be weak?" Let them work toward
 it. Answers include slow response to crisis, diffuse accountability, and power
 flowing to whoever can navigate the fragmentation, usually organized interests.
@@ -3068,7 +3073,7 @@
                 <a:ea typeface="Cambria" pitchFamily="34" charset="-122"/>
                 <a:cs typeface="Cambria" pitchFamily="34" charset="-120"/>
               </a:rPr>
-              <a:t>500+</a:t>
+              <a:t>547</a:t>
             </a:r>
             <a:endParaRPr lang="en-US" sz="4600" dirty="0"/>
           </a:p>
@@ -3110,7 +3115,7 @@
                 <a:ea typeface="Calibri" pitchFamily="34" charset="-122"/>
                 <a:cs typeface="Calibri" pitchFamily="34" charset="-120"/>
               </a:rPr>
-              <a:t>amendments adopted since 1876, out of nearly 700 proposed. The document now runs past 86,000 words, about eleven times the length of the U.S. Constitution.</a:t>
+              <a:t>amendments adopted since 1876, out of 731 proposed, through the November 2025 election. The document now runs past 90,000 words, about twelve times the length of the U.S. Constitution.</a:t>
             </a:r>
             <a:endParaRPr lang="en-US" sz="1300" dirty="0"/>
           </a:p>
@@ -4347,7 +4352,7 @@
                 <a:ea typeface="Calibri" pitchFamily="34" charset="-122"/>
                 <a:cs typeface="Calibri" pitchFamily="34" charset="-120"/>
               </a:rPr>
-              <a:t>More than 86,000 words</a:t>
+              <a:t>More than 90,000 words</a:t>
             </a:r>
             <a:endParaRPr lang="en-US" sz="1200" dirty="0"/>
           </a:p>
@@ -4495,7 +4500,7 @@
                 <a:ea typeface="Calibri" pitchFamily="34" charset="-122"/>
                 <a:cs typeface="Calibri" pitchFamily="34" charset="-120"/>
               </a:rPr>
-              <a:t>More than 500 since 1876</a:t>
+              <a:t>547 since 1876 (through Nov. 2025)</a:t>
             </a:r>
             <a:endParaRPr lang="en-US" sz="1200" dirty="0"/>
           </a:p>
@@ -6779,7 +6784,7 @@
                 <a:ea typeface="Calibri" pitchFamily="34" charset="-122"/>
                 <a:cs typeface="Calibri" pitchFamily="34" charset="-120"/>
               </a:rPr>
-              <a:t>National Conference of State Legislatures maintains comparative data on state constitutions, length, and amendment rates.</a:t>
+              <a:t>Council of State Governments, The Book of the States, publishes comparative tables on state constitutions, their length, and amendment counts; Ballotpedia tracks each state's amendment elections.</a:t>
             </a:r>
             <a:endParaRPr lang="en-US" sz="1250" dirty="0"/>
           </a:p>
@@ -11080,7 +11085,7 @@
                 <a:ea typeface="Calibri" pitchFamily="34" charset="-122"/>
                 <a:cs typeface="Calibri" pitchFamily="34" charset="-120"/>
               </a:rPr>
-              <a:t>It gave the governor a four year term, control of appointments, authority over voter registration, and a state police force. Those powers went to E. J. Davis, and the reaction against how he used them produced the constitution Texas still has.</a:t>
+              <a:t>It gave the governor a four year term, control of appointments including judges, and the first constitutional provision for voter registration; the Legislature then added a state police force under his control in 1870. Those powers went to E. J. Davis, and the reaction against how he used them produced the constitution Texas still has.</a:t>
             </a:r>
             <a:endParaRPr lang="en-US" sz="1250" dirty="0"/>
           </a:p>
@@ -11867,7 +11872,7 @@
                 <a:ea typeface="Calibri" pitchFamily="34" charset="-122"/>
                 <a:cs typeface="Calibri" pitchFamily="34" charset="-120"/>
               </a:rPr>
-              <a:t>Attorney general, comptroller, land commissioner, and agriculture commissioner all elected separately.</a:t>
+              <a:t>Lieutenant governor, attorney general, comptroller, land commissioner, and (until 1996) treasurer all elected separately; the agriculture commissioner was added by statute in 1907.</a:t>
             </a:r>
             <a:endParaRPr lang="en-US" sz="1250" dirty="0"/>
           </a:p>
@@ -11948,7 +11953,7 @@
                 <a:ea typeface="Calibri" pitchFamily="34" charset="-122"/>
                 <a:cs typeface="Calibri" pitchFamily="34" charset="-120"/>
               </a:rPr>
-              <a:t>140 days every two years, with low pay.</a:t>
+              <a:t>Meets once every two years, with low pay. (The 140-day cap was added by amendment in 1960.)</a:t>
             </a:r>
             <a:endParaRPr lang="en-US" sz="1250" dirty="0"/>
           </a:p>
